--- a/中越詩歌/榮耀歸主名_Vinh danh thay Jê-sus.pptx
+++ b/中越詩歌/榮耀歸主名_Vinh danh thay Jê-sus.pptx
@@ -178,7 +178,7 @@
           <a:lstStyle/>
           <a:p>
             <a:r>
-              <a:rPr lang="en-US" altLang="zh-TW" smtClean="0"/>
+              <a:rPr lang="en-US" altLang="zh-TW"/>
               <a:t>Click to edit Master title style</a:t>
             </a:r>
             <a:endParaRPr lang="zh-TW" altLang="en-US"/>
@@ -297,7 +297,7 @@
           </a:lstStyle>
           <a:p>
             <a:r>
-              <a:rPr lang="en-US" altLang="zh-TW" smtClean="0"/>
+              <a:rPr lang="en-US" altLang="zh-TW"/>
               <a:t>Click to edit Master subtitle style</a:t>
             </a:r>
             <a:endParaRPr lang="zh-TW" altLang="en-US"/>
@@ -321,7 +321,7 @@
           <a:p>
             <a:fld id="{EBC3F0EA-C276-4A88-8A41-A159B8BAB9B6}" type="datetimeFigureOut">
               <a:rPr lang="vi-VN" smtClean="0"/>
-              <a:t>04/04/2023</a:t>
+              <a:t>29/03/2026</a:t>
             </a:fld>
             <a:endParaRPr lang="vi-VN"/>
           </a:p>
@@ -415,7 +415,7 @@
           <a:lstStyle/>
           <a:p>
             <a:r>
-              <a:rPr lang="en-US" altLang="zh-TW" smtClean="0"/>
+              <a:rPr lang="en-US" altLang="zh-TW"/>
               <a:t>Click to edit Master title style</a:t>
             </a:r>
             <a:endParaRPr lang="zh-TW" altLang="en-US"/>
@@ -439,35 +439,35 @@
           <a:p>
             <a:pPr lvl="0"/>
             <a:r>
-              <a:rPr lang="en-US" altLang="zh-TW" smtClean="0"/>
+              <a:rPr lang="en-US" altLang="zh-TW"/>
               <a:t>Edit Master text styles</a:t>
             </a:r>
           </a:p>
           <a:p>
             <a:pPr lvl="1"/>
             <a:r>
-              <a:rPr lang="en-US" altLang="zh-TW" smtClean="0"/>
+              <a:rPr lang="en-US" altLang="zh-TW"/>
               <a:t>Second level</a:t>
             </a:r>
           </a:p>
           <a:p>
             <a:pPr lvl="2"/>
             <a:r>
-              <a:rPr lang="en-US" altLang="zh-TW" smtClean="0"/>
+              <a:rPr lang="en-US" altLang="zh-TW"/>
               <a:t>Third level</a:t>
             </a:r>
           </a:p>
           <a:p>
             <a:pPr lvl="3"/>
             <a:r>
-              <a:rPr lang="en-US" altLang="zh-TW" smtClean="0"/>
+              <a:rPr lang="en-US" altLang="zh-TW"/>
               <a:t>Fourth level</a:t>
             </a:r>
           </a:p>
           <a:p>
             <a:pPr lvl="4"/>
             <a:r>
-              <a:rPr lang="en-US" altLang="zh-TW" smtClean="0"/>
+              <a:rPr lang="en-US" altLang="zh-TW"/>
               <a:t>Fifth level</a:t>
             </a:r>
             <a:endParaRPr lang="zh-TW" altLang="en-US"/>
@@ -491,7 +491,7 @@
           <a:p>
             <a:fld id="{EBC3F0EA-C276-4A88-8A41-A159B8BAB9B6}" type="datetimeFigureOut">
               <a:rPr lang="vi-VN" smtClean="0"/>
-              <a:t>04/04/2023</a:t>
+              <a:t>29/03/2026</a:t>
             </a:fld>
             <a:endParaRPr lang="vi-VN"/>
           </a:p>
@@ -590,7 +590,7 @@
           <a:lstStyle/>
           <a:p>
             <a:r>
-              <a:rPr lang="en-US" altLang="zh-TW" smtClean="0"/>
+              <a:rPr lang="en-US" altLang="zh-TW"/>
               <a:t>Click to edit Master title style</a:t>
             </a:r>
             <a:endParaRPr lang="zh-TW" altLang="en-US"/>
@@ -619,35 +619,35 @@
           <a:p>
             <a:pPr lvl="0"/>
             <a:r>
-              <a:rPr lang="en-US" altLang="zh-TW" smtClean="0"/>
+              <a:rPr lang="en-US" altLang="zh-TW"/>
               <a:t>Edit Master text styles</a:t>
             </a:r>
           </a:p>
           <a:p>
             <a:pPr lvl="1"/>
             <a:r>
-              <a:rPr lang="en-US" altLang="zh-TW" smtClean="0"/>
+              <a:rPr lang="en-US" altLang="zh-TW"/>
               <a:t>Second level</a:t>
             </a:r>
           </a:p>
           <a:p>
             <a:pPr lvl="2"/>
             <a:r>
-              <a:rPr lang="en-US" altLang="zh-TW" smtClean="0"/>
+              <a:rPr lang="en-US" altLang="zh-TW"/>
               <a:t>Third level</a:t>
             </a:r>
           </a:p>
           <a:p>
             <a:pPr lvl="3"/>
             <a:r>
-              <a:rPr lang="en-US" altLang="zh-TW" smtClean="0"/>
+              <a:rPr lang="en-US" altLang="zh-TW"/>
               <a:t>Fourth level</a:t>
             </a:r>
           </a:p>
           <a:p>
             <a:pPr lvl="4"/>
             <a:r>
-              <a:rPr lang="en-US" altLang="zh-TW" smtClean="0"/>
+              <a:rPr lang="en-US" altLang="zh-TW"/>
               <a:t>Fifth level</a:t>
             </a:r>
             <a:endParaRPr lang="zh-TW" altLang="en-US"/>
@@ -671,7 +671,7 @@
           <a:p>
             <a:fld id="{EBC3F0EA-C276-4A88-8A41-A159B8BAB9B6}" type="datetimeFigureOut">
               <a:rPr lang="vi-VN" smtClean="0"/>
-              <a:t>04/04/2023</a:t>
+              <a:t>29/03/2026</a:t>
             </a:fld>
             <a:endParaRPr lang="vi-VN"/>
           </a:p>
@@ -765,7 +765,7 @@
           <a:lstStyle/>
           <a:p>
             <a:r>
-              <a:rPr lang="en-US" altLang="zh-TW" smtClean="0"/>
+              <a:rPr lang="en-US" altLang="zh-TW"/>
               <a:t>Click to edit Master title style</a:t>
             </a:r>
             <a:endParaRPr lang="zh-TW" altLang="en-US"/>
@@ -789,35 +789,35 @@
           <a:p>
             <a:pPr lvl="0"/>
             <a:r>
-              <a:rPr lang="en-US" altLang="zh-TW" smtClean="0"/>
+              <a:rPr lang="en-US" altLang="zh-TW"/>
               <a:t>Edit Master text styles</a:t>
             </a:r>
           </a:p>
           <a:p>
             <a:pPr lvl="1"/>
             <a:r>
-              <a:rPr lang="en-US" altLang="zh-TW" smtClean="0"/>
+              <a:rPr lang="en-US" altLang="zh-TW"/>
               <a:t>Second level</a:t>
             </a:r>
           </a:p>
           <a:p>
             <a:pPr lvl="2"/>
             <a:r>
-              <a:rPr lang="en-US" altLang="zh-TW" smtClean="0"/>
+              <a:rPr lang="en-US" altLang="zh-TW"/>
               <a:t>Third level</a:t>
             </a:r>
           </a:p>
           <a:p>
             <a:pPr lvl="3"/>
             <a:r>
-              <a:rPr lang="en-US" altLang="zh-TW" smtClean="0"/>
+              <a:rPr lang="en-US" altLang="zh-TW"/>
               <a:t>Fourth level</a:t>
             </a:r>
           </a:p>
           <a:p>
             <a:pPr lvl="4"/>
             <a:r>
-              <a:rPr lang="en-US" altLang="zh-TW" smtClean="0"/>
+              <a:rPr lang="en-US" altLang="zh-TW"/>
               <a:t>Fifth level</a:t>
             </a:r>
             <a:endParaRPr lang="zh-TW" altLang="en-US"/>
@@ -841,7 +841,7 @@
           <a:p>
             <a:fld id="{EBC3F0EA-C276-4A88-8A41-A159B8BAB9B6}" type="datetimeFigureOut">
               <a:rPr lang="vi-VN" smtClean="0"/>
-              <a:t>04/04/2023</a:t>
+              <a:t>29/03/2026</a:t>
             </a:fld>
             <a:endParaRPr lang="vi-VN"/>
           </a:p>
@@ -944,7 +944,7 @@
           </a:lstStyle>
           <a:p>
             <a:r>
-              <a:rPr lang="en-US" altLang="zh-TW" smtClean="0"/>
+              <a:rPr lang="en-US" altLang="zh-TW"/>
               <a:t>Click to edit Master title style</a:t>
             </a:r>
             <a:endParaRPr lang="zh-TW" altLang="en-US"/>
@@ -1064,7 +1064,7 @@
           <a:p>
             <a:pPr lvl="0"/>
             <a:r>
-              <a:rPr lang="en-US" altLang="zh-TW" smtClean="0"/>
+              <a:rPr lang="en-US" altLang="zh-TW"/>
               <a:t>Edit Master text styles</a:t>
             </a:r>
           </a:p>
@@ -1087,7 +1087,7 @@
           <a:p>
             <a:fld id="{EBC3F0EA-C276-4A88-8A41-A159B8BAB9B6}" type="datetimeFigureOut">
               <a:rPr lang="vi-VN" smtClean="0"/>
-              <a:t>04/04/2023</a:t>
+              <a:t>29/03/2026</a:t>
             </a:fld>
             <a:endParaRPr lang="vi-VN"/>
           </a:p>
@@ -1181,7 +1181,7 @@
           <a:lstStyle/>
           <a:p>
             <a:r>
-              <a:rPr lang="en-US" altLang="zh-TW" smtClean="0"/>
+              <a:rPr lang="en-US" altLang="zh-TW"/>
               <a:t>Click to edit Master title style</a:t>
             </a:r>
             <a:endParaRPr lang="zh-TW" altLang="en-US"/>
@@ -1238,35 +1238,35 @@
           <a:p>
             <a:pPr lvl="0"/>
             <a:r>
-              <a:rPr lang="en-US" altLang="zh-TW" smtClean="0"/>
+              <a:rPr lang="en-US" altLang="zh-TW"/>
               <a:t>Edit Master text styles</a:t>
             </a:r>
           </a:p>
           <a:p>
             <a:pPr lvl="1"/>
             <a:r>
-              <a:rPr lang="en-US" altLang="zh-TW" smtClean="0"/>
+              <a:rPr lang="en-US" altLang="zh-TW"/>
               <a:t>Second level</a:t>
             </a:r>
           </a:p>
           <a:p>
             <a:pPr lvl="2"/>
             <a:r>
-              <a:rPr lang="en-US" altLang="zh-TW" smtClean="0"/>
+              <a:rPr lang="en-US" altLang="zh-TW"/>
               <a:t>Third level</a:t>
             </a:r>
           </a:p>
           <a:p>
             <a:pPr lvl="3"/>
             <a:r>
-              <a:rPr lang="en-US" altLang="zh-TW" smtClean="0"/>
+              <a:rPr lang="en-US" altLang="zh-TW"/>
               <a:t>Fourth level</a:t>
             </a:r>
           </a:p>
           <a:p>
             <a:pPr lvl="4"/>
             <a:r>
-              <a:rPr lang="en-US" altLang="zh-TW" smtClean="0"/>
+              <a:rPr lang="en-US" altLang="zh-TW"/>
               <a:t>Fifth level</a:t>
             </a:r>
             <a:endParaRPr lang="zh-TW" altLang="en-US"/>
@@ -1323,35 +1323,35 @@
           <a:p>
             <a:pPr lvl="0"/>
             <a:r>
-              <a:rPr lang="en-US" altLang="zh-TW" smtClean="0"/>
+              <a:rPr lang="en-US" altLang="zh-TW"/>
               <a:t>Edit Master text styles</a:t>
             </a:r>
           </a:p>
           <a:p>
             <a:pPr lvl="1"/>
             <a:r>
-              <a:rPr lang="en-US" altLang="zh-TW" smtClean="0"/>
+              <a:rPr lang="en-US" altLang="zh-TW"/>
               <a:t>Second level</a:t>
             </a:r>
           </a:p>
           <a:p>
             <a:pPr lvl="2"/>
             <a:r>
-              <a:rPr lang="en-US" altLang="zh-TW" smtClean="0"/>
+              <a:rPr lang="en-US" altLang="zh-TW"/>
               <a:t>Third level</a:t>
             </a:r>
           </a:p>
           <a:p>
             <a:pPr lvl="3"/>
             <a:r>
-              <a:rPr lang="en-US" altLang="zh-TW" smtClean="0"/>
+              <a:rPr lang="en-US" altLang="zh-TW"/>
               <a:t>Fourth level</a:t>
             </a:r>
           </a:p>
           <a:p>
             <a:pPr lvl="4"/>
             <a:r>
-              <a:rPr lang="en-US" altLang="zh-TW" smtClean="0"/>
+              <a:rPr lang="en-US" altLang="zh-TW"/>
               <a:t>Fifth level</a:t>
             </a:r>
             <a:endParaRPr lang="zh-TW" altLang="en-US"/>
@@ -1375,7 +1375,7 @@
           <a:p>
             <a:fld id="{EBC3F0EA-C276-4A88-8A41-A159B8BAB9B6}" type="datetimeFigureOut">
               <a:rPr lang="vi-VN" smtClean="0"/>
-              <a:t>04/04/2023</a:t>
+              <a:t>29/03/2026</a:t>
             </a:fld>
             <a:endParaRPr lang="vi-VN"/>
           </a:p>
@@ -1473,7 +1473,7 @@
           </a:lstStyle>
           <a:p>
             <a:r>
-              <a:rPr lang="en-US" altLang="zh-TW" smtClean="0"/>
+              <a:rPr lang="en-US" altLang="zh-TW"/>
               <a:t>Click to edit Master title style</a:t>
             </a:r>
             <a:endParaRPr lang="zh-TW" altLang="en-US"/>
@@ -1539,7 +1539,7 @@
           <a:p>
             <a:pPr lvl="0"/>
             <a:r>
-              <a:rPr lang="en-US" altLang="zh-TW" smtClean="0"/>
+              <a:rPr lang="en-US" altLang="zh-TW"/>
               <a:t>Edit Master text styles</a:t>
             </a:r>
           </a:p>
@@ -1595,35 +1595,35 @@
           <a:p>
             <a:pPr lvl="0"/>
             <a:r>
-              <a:rPr lang="en-US" altLang="zh-TW" smtClean="0"/>
+              <a:rPr lang="en-US" altLang="zh-TW"/>
               <a:t>Edit Master text styles</a:t>
             </a:r>
           </a:p>
           <a:p>
             <a:pPr lvl="1"/>
             <a:r>
-              <a:rPr lang="en-US" altLang="zh-TW" smtClean="0"/>
+              <a:rPr lang="en-US" altLang="zh-TW"/>
               <a:t>Second level</a:t>
             </a:r>
           </a:p>
           <a:p>
             <a:pPr lvl="2"/>
             <a:r>
-              <a:rPr lang="en-US" altLang="zh-TW" smtClean="0"/>
+              <a:rPr lang="en-US" altLang="zh-TW"/>
               <a:t>Third level</a:t>
             </a:r>
           </a:p>
           <a:p>
             <a:pPr lvl="3"/>
             <a:r>
-              <a:rPr lang="en-US" altLang="zh-TW" smtClean="0"/>
+              <a:rPr lang="en-US" altLang="zh-TW"/>
               <a:t>Fourth level</a:t>
             </a:r>
           </a:p>
           <a:p>
             <a:pPr lvl="4"/>
             <a:r>
-              <a:rPr lang="en-US" altLang="zh-TW" smtClean="0"/>
+              <a:rPr lang="en-US" altLang="zh-TW"/>
               <a:t>Fifth level</a:t>
             </a:r>
             <a:endParaRPr lang="zh-TW" altLang="en-US"/>
@@ -1689,7 +1689,7 @@
           <a:p>
             <a:pPr lvl="0"/>
             <a:r>
-              <a:rPr lang="en-US" altLang="zh-TW" smtClean="0"/>
+              <a:rPr lang="en-US" altLang="zh-TW"/>
               <a:t>Edit Master text styles</a:t>
             </a:r>
           </a:p>
@@ -1745,35 +1745,35 @@
           <a:p>
             <a:pPr lvl="0"/>
             <a:r>
-              <a:rPr lang="en-US" altLang="zh-TW" smtClean="0"/>
+              <a:rPr lang="en-US" altLang="zh-TW"/>
               <a:t>Edit Master text styles</a:t>
             </a:r>
           </a:p>
           <a:p>
             <a:pPr lvl="1"/>
             <a:r>
-              <a:rPr lang="en-US" altLang="zh-TW" smtClean="0"/>
+              <a:rPr lang="en-US" altLang="zh-TW"/>
               <a:t>Second level</a:t>
             </a:r>
           </a:p>
           <a:p>
             <a:pPr lvl="2"/>
             <a:r>
-              <a:rPr lang="en-US" altLang="zh-TW" smtClean="0"/>
+              <a:rPr lang="en-US" altLang="zh-TW"/>
               <a:t>Third level</a:t>
             </a:r>
           </a:p>
           <a:p>
             <a:pPr lvl="3"/>
             <a:r>
-              <a:rPr lang="en-US" altLang="zh-TW" smtClean="0"/>
+              <a:rPr lang="en-US" altLang="zh-TW"/>
               <a:t>Fourth level</a:t>
             </a:r>
           </a:p>
           <a:p>
             <a:pPr lvl="4"/>
             <a:r>
-              <a:rPr lang="en-US" altLang="zh-TW" smtClean="0"/>
+              <a:rPr lang="en-US" altLang="zh-TW"/>
               <a:t>Fifth level</a:t>
             </a:r>
             <a:endParaRPr lang="zh-TW" altLang="en-US"/>
@@ -1797,7 +1797,7 @@
           <a:p>
             <a:fld id="{EBC3F0EA-C276-4A88-8A41-A159B8BAB9B6}" type="datetimeFigureOut">
               <a:rPr lang="vi-VN" smtClean="0"/>
-              <a:t>04/04/2023</a:t>
+              <a:t>29/03/2026</a:t>
             </a:fld>
             <a:endParaRPr lang="vi-VN"/>
           </a:p>
@@ -1891,7 +1891,7 @@
           <a:lstStyle/>
           <a:p>
             <a:r>
-              <a:rPr lang="en-US" altLang="zh-TW" smtClean="0"/>
+              <a:rPr lang="en-US" altLang="zh-TW"/>
               <a:t>Click to edit Master title style</a:t>
             </a:r>
             <a:endParaRPr lang="zh-TW" altLang="en-US"/>
@@ -1915,7 +1915,7 @@
           <a:p>
             <a:fld id="{EBC3F0EA-C276-4A88-8A41-A159B8BAB9B6}" type="datetimeFigureOut">
               <a:rPr lang="vi-VN" smtClean="0"/>
-              <a:t>04/04/2023</a:t>
+              <a:t>29/03/2026</a:t>
             </a:fld>
             <a:endParaRPr lang="vi-VN"/>
           </a:p>
@@ -2010,7 +2010,7 @@
           <a:p>
             <a:fld id="{EBC3F0EA-C276-4A88-8A41-A159B8BAB9B6}" type="datetimeFigureOut">
               <a:rPr lang="vi-VN" smtClean="0"/>
-              <a:t>04/04/2023</a:t>
+              <a:t>29/03/2026</a:t>
             </a:fld>
             <a:endParaRPr lang="vi-VN"/>
           </a:p>
@@ -2113,7 +2113,7 @@
           </a:lstStyle>
           <a:p>
             <a:r>
-              <a:rPr lang="en-US" altLang="zh-TW" smtClean="0"/>
+              <a:rPr lang="en-US" altLang="zh-TW"/>
               <a:t>Click to edit Master title style</a:t>
             </a:r>
             <a:endParaRPr lang="zh-TW" altLang="en-US"/>
@@ -2170,35 +2170,35 @@
           <a:p>
             <a:pPr lvl="0"/>
             <a:r>
-              <a:rPr lang="en-US" altLang="zh-TW" smtClean="0"/>
+              <a:rPr lang="en-US" altLang="zh-TW"/>
               <a:t>Edit Master text styles</a:t>
             </a:r>
           </a:p>
           <a:p>
             <a:pPr lvl="1"/>
             <a:r>
-              <a:rPr lang="en-US" altLang="zh-TW" smtClean="0"/>
+              <a:rPr lang="en-US" altLang="zh-TW"/>
               <a:t>Second level</a:t>
             </a:r>
           </a:p>
           <a:p>
             <a:pPr lvl="2"/>
             <a:r>
-              <a:rPr lang="en-US" altLang="zh-TW" smtClean="0"/>
+              <a:rPr lang="en-US" altLang="zh-TW"/>
               <a:t>Third level</a:t>
             </a:r>
           </a:p>
           <a:p>
             <a:pPr lvl="3"/>
             <a:r>
-              <a:rPr lang="en-US" altLang="zh-TW" smtClean="0"/>
+              <a:rPr lang="en-US" altLang="zh-TW"/>
               <a:t>Fourth level</a:t>
             </a:r>
           </a:p>
           <a:p>
             <a:pPr lvl="4"/>
             <a:r>
-              <a:rPr lang="en-US" altLang="zh-TW" smtClean="0"/>
+              <a:rPr lang="en-US" altLang="zh-TW"/>
               <a:t>Fifth level</a:t>
             </a:r>
             <a:endParaRPr lang="zh-TW" altLang="en-US"/>
@@ -2264,7 +2264,7 @@
           <a:p>
             <a:pPr lvl="0"/>
             <a:r>
-              <a:rPr lang="en-US" altLang="zh-TW" smtClean="0"/>
+              <a:rPr lang="en-US" altLang="zh-TW"/>
               <a:t>Edit Master text styles</a:t>
             </a:r>
           </a:p>
@@ -2287,7 +2287,7 @@
           <a:p>
             <a:fld id="{EBC3F0EA-C276-4A88-8A41-A159B8BAB9B6}" type="datetimeFigureOut">
               <a:rPr lang="vi-VN" smtClean="0"/>
-              <a:t>04/04/2023</a:t>
+              <a:t>29/03/2026</a:t>
             </a:fld>
             <a:endParaRPr lang="vi-VN"/>
           </a:p>
@@ -2390,7 +2390,7 @@
           </a:lstStyle>
           <a:p>
             <a:r>
-              <a:rPr lang="en-US" altLang="zh-TW" smtClean="0"/>
+              <a:rPr lang="en-US" altLang="zh-TW"/>
               <a:t>Click to edit Master title style</a:t>
             </a:r>
             <a:endParaRPr lang="zh-TW" altLang="en-US"/>
@@ -2455,7 +2455,7 @@
           </a:lstStyle>
           <a:p>
             <a:r>
-              <a:rPr lang="en-US" altLang="zh-TW" smtClean="0"/>
+              <a:rPr lang="en-US" altLang="zh-TW"/>
               <a:t>Click icon to add picture</a:t>
             </a:r>
             <a:endParaRPr lang="zh-TW" altLang="en-US"/>
@@ -2521,7 +2521,7 @@
           <a:p>
             <a:pPr lvl="0"/>
             <a:r>
-              <a:rPr lang="en-US" altLang="zh-TW" smtClean="0"/>
+              <a:rPr lang="en-US" altLang="zh-TW"/>
               <a:t>Edit Master text styles</a:t>
             </a:r>
           </a:p>
@@ -2544,7 +2544,7 @@
           <a:p>
             <a:fld id="{EBC3F0EA-C276-4A88-8A41-A159B8BAB9B6}" type="datetimeFigureOut">
               <a:rPr lang="vi-VN" smtClean="0"/>
-              <a:t>04/04/2023</a:t>
+              <a:t>29/03/2026</a:t>
             </a:fld>
             <a:endParaRPr lang="vi-VN"/>
           </a:p>
@@ -2658,10 +2658,9 @@
           <a:lstStyle/>
           <a:p>
             <a:r>
-              <a:rPr lang="zh-TW" altLang="en-US" smtClean="0"/>
+              <a:rPr lang="zh-TW" altLang="en-US"/>
               <a:t>按一下以編輯母片標題樣式</a:t>
             </a:r>
-            <a:endParaRPr lang="zh-TW" altLang="en-US"/>
           </a:p>
         </p:txBody>
       </p:sp>
@@ -2692,38 +2691,37 @@
           <a:p>
             <a:pPr lvl="0"/>
             <a:r>
-              <a:rPr lang="zh-TW" altLang="en-US" smtClean="0"/>
+              <a:rPr lang="zh-TW" altLang="en-US"/>
               <a:t>按一下以編輯母片文字樣式</a:t>
             </a:r>
           </a:p>
           <a:p>
             <a:pPr lvl="1"/>
             <a:r>
-              <a:rPr lang="zh-TW" altLang="en-US" smtClean="0"/>
+              <a:rPr lang="zh-TW" altLang="en-US"/>
               <a:t>第二層</a:t>
             </a:r>
           </a:p>
           <a:p>
             <a:pPr lvl="2"/>
             <a:r>
-              <a:rPr lang="zh-TW" altLang="en-US" smtClean="0"/>
+              <a:rPr lang="zh-TW" altLang="en-US"/>
               <a:t>第三層</a:t>
             </a:r>
           </a:p>
           <a:p>
             <a:pPr lvl="3"/>
             <a:r>
-              <a:rPr lang="zh-TW" altLang="en-US" smtClean="0"/>
+              <a:rPr lang="zh-TW" altLang="en-US"/>
               <a:t>第四層</a:t>
             </a:r>
           </a:p>
           <a:p>
             <a:pPr lvl="4"/>
             <a:r>
-              <a:rPr lang="zh-TW" altLang="en-US" smtClean="0"/>
+              <a:rPr lang="zh-TW" altLang="en-US"/>
               <a:t>第五層</a:t>
             </a:r>
-            <a:endParaRPr lang="zh-TW" altLang="en-US"/>
           </a:p>
         </p:txBody>
       </p:sp>
@@ -2762,7 +2760,7 @@
           <a:p>
             <a:fld id="{EBC3F0EA-C276-4A88-8A41-A159B8BAB9B6}" type="datetimeFigureOut">
               <a:rPr lang="vi-VN" smtClean="0"/>
-              <a:t>04/04/2023</a:t>
+              <a:t>29/03/2026</a:t>
             </a:fld>
             <a:endParaRPr lang="vi-VN"/>
           </a:p>
@@ -5271,23 +5269,7 @@
                   <a:srgbClr val="660033"/>
                 </a:solidFill>
               </a:rPr>
-              <a:t>( </a:t>
-            </a:r>
-            <a:r>
-              <a:rPr lang="en-US" sz="4267" b="1" dirty="0" smtClean="0">
-                <a:solidFill>
-                  <a:srgbClr val="660033"/>
-                </a:solidFill>
-              </a:rPr>
-              <a:t>3 </a:t>
-            </a:r>
-            <a:r>
-              <a:rPr lang="en-US" sz="4267" b="1" dirty="0">
-                <a:solidFill>
-                  <a:srgbClr val="660033"/>
-                </a:solidFill>
-              </a:rPr>
-              <a:t>/ 4 )</a:t>
+              <a:t>( 3 / 4 )</a:t>
             </a:r>
             <a:endParaRPr lang="vi-VN" sz="4267" b="1" dirty="0">
               <a:solidFill>
@@ -6444,7 +6426,31 @@
                 <a:ea typeface="微軟正黑體" pitchFamily="34" charset="-120"/>
                 <a:cs typeface="Calibri" panose="020F0502020204030204" pitchFamily="34" charset="0"/>
               </a:rPr>
-              <a:t>Chính chỗ thập tự xưa Jêsus treo mình</a:t>
+              <a:t>Chính chỗ thập tự xưa Jê</a:t>
+            </a:r>
+            <a:r>
+              <a:rPr lang="en-US" sz="4400" b="1" dirty="0">
+                <a:solidFill>
+                  <a:srgbClr val="000066"/>
+                </a:solidFill>
+                <a:effectLst/>
+                <a:latin typeface="Calibri" panose="020F0502020204030204" pitchFamily="34" charset="0"/>
+                <a:ea typeface="微軟正黑體" pitchFamily="34" charset="-120"/>
+                <a:cs typeface="Calibri" panose="020F0502020204030204" pitchFamily="34" charset="0"/>
+              </a:rPr>
+              <a:t>-</a:t>
+            </a:r>
+            <a:r>
+              <a:rPr lang="vi-VN" sz="4400" b="1" dirty="0">
+                <a:solidFill>
+                  <a:srgbClr val="000066"/>
+                </a:solidFill>
+                <a:effectLst/>
+                <a:latin typeface="Calibri" panose="020F0502020204030204" pitchFamily="34" charset="0"/>
+                <a:ea typeface="微軟正黑體" pitchFamily="34" charset="-120"/>
+                <a:cs typeface="Calibri" panose="020F0502020204030204" pitchFamily="34" charset="0"/>
+              </a:rPr>
+              <a:t>sus treo mình</a:t>
             </a:r>
             <a:endParaRPr lang="en-US" sz="4400" b="1" dirty="0">
               <a:solidFill>
@@ -6488,25 +6494,7 @@
                 </a:solidFill>
                 <a:effectLst/>
               </a:rPr>
-              <a:t>( </a:t>
-            </a:r>
-            <a:r>
-              <a:rPr lang="en-US" sz="4267" b="1" dirty="0" smtClean="0">
-                <a:solidFill>
-                  <a:srgbClr val="660033"/>
-                </a:solidFill>
-                <a:effectLst/>
-              </a:rPr>
-              <a:t>1 / 4 </a:t>
-            </a:r>
-            <a:r>
-              <a:rPr lang="en-US" sz="4267" b="1" dirty="0">
-                <a:solidFill>
-                  <a:srgbClr val="660033"/>
-                </a:solidFill>
-                <a:effectLst/>
-              </a:rPr>
-              <a:t>)</a:t>
+              <a:t>( 1 / 4 )</a:t>
             </a:r>
             <a:endParaRPr lang="vi-VN" sz="4267" b="1" dirty="0">
               <a:solidFill>
@@ -7621,23 +7609,7 @@
                   <a:srgbClr val="660033"/>
                 </a:solidFill>
               </a:rPr>
-              <a:t>( </a:t>
-            </a:r>
-            <a:r>
-              <a:rPr lang="en-US" sz="4267" b="1" dirty="0" smtClean="0">
-                <a:solidFill>
-                  <a:srgbClr val="660033"/>
-                </a:solidFill>
-              </a:rPr>
-              <a:t>4 </a:t>
-            </a:r>
-            <a:r>
-              <a:rPr lang="en-US" sz="4267" b="1" dirty="0">
-                <a:solidFill>
-                  <a:srgbClr val="660033"/>
-                </a:solidFill>
-              </a:rPr>
-              <a:t>/ 4 )</a:t>
+              <a:t>( 4 / 4 )</a:t>
             </a:r>
             <a:endParaRPr lang="vi-VN" sz="4267" b="1" dirty="0">
               <a:solidFill>
@@ -11322,31 +11294,7 @@
                 <a:ea typeface="微軟正黑體" pitchFamily="34" charset="-120"/>
                 <a:cs typeface="Calibri" panose="020F0502020204030204" pitchFamily="34" charset="0"/>
               </a:rPr>
-              <a:t>Chúa cứu tôi, </a:t>
-            </a:r>
-            <a:r>
-              <a:rPr lang="vi-VN" sz="4400" b="1" dirty="0" smtClean="0">
-                <a:solidFill>
-                  <a:srgbClr val="000066"/>
-                </a:solidFill>
-                <a:effectLst/>
-                <a:latin typeface="Calibri" panose="020F0502020204030204" pitchFamily="34" charset="0"/>
-                <a:ea typeface="微軟正黑體" pitchFamily="34" charset="-120"/>
-                <a:cs typeface="Calibri" panose="020F0502020204030204" pitchFamily="34" charset="0"/>
-              </a:rPr>
-              <a:t>ôi </a:t>
-            </a:r>
-            <a:r>
-              <a:rPr lang="vi-VN" sz="4400" b="1" dirty="0">
-                <a:solidFill>
-                  <a:srgbClr val="000066"/>
-                </a:solidFill>
-                <a:effectLst/>
-                <a:latin typeface="Calibri" panose="020F0502020204030204" pitchFamily="34" charset="0"/>
-                <a:ea typeface="微軟正黑體" pitchFamily="34" charset="-120"/>
-                <a:cs typeface="Calibri" panose="020F0502020204030204" pitchFamily="34" charset="0"/>
-              </a:rPr>
-              <a:t>ơn sâu rộng muôn trùng</a:t>
+              <a:t>Chúa cứu tôi, ôi ơn sâu rộng muôn trùng</a:t>
             </a:r>
             <a:endParaRPr lang="en-US" sz="4400" b="1" dirty="0">
               <a:solidFill>
@@ -11389,23 +11337,7 @@
                   <a:srgbClr val="660033"/>
                 </a:solidFill>
               </a:rPr>
-              <a:t>( </a:t>
-            </a:r>
-            <a:r>
-              <a:rPr lang="en-US" sz="4267" b="1" dirty="0" smtClean="0">
-                <a:solidFill>
-                  <a:srgbClr val="660033"/>
-                </a:solidFill>
-              </a:rPr>
-              <a:t>2 </a:t>
-            </a:r>
-            <a:r>
-              <a:rPr lang="en-US" sz="4267" b="1" dirty="0">
-                <a:solidFill>
-                  <a:srgbClr val="660033"/>
-                </a:solidFill>
-              </a:rPr>
-              <a:t>/ 4 )</a:t>
+              <a:t>( 2 / 4 )</a:t>
             </a:r>
             <a:endParaRPr lang="vi-VN" sz="4267" b="1" dirty="0">
               <a:solidFill>
